--- a/курсач/презентация.pptx
+++ b/курсач/презентация.pptx
@@ -9090,10 +9090,10 @@
                 <a:ea typeface="+mj-ea"/>
                 <a:cs typeface="Arial" panose="020B0604020202020204" pitchFamily="34" charset="0"/>
               </a:rPr>
-              <a:t>• Спроектировать логическую и физическую структуру базы </a:t>
-            </a:r>
-            <a:r>
-              <a:rPr lang="ru-RU" sz="2000" cap="all" dirty="0" err="1">
+              <a:t>• Спроектировать логическую и физическую структуру </a:t>
+            </a:r>
+            <a:r>
+              <a:rPr lang="ru-RU" sz="2000" cap="all">
                 <a:solidFill>
                   <a:schemeClr val="tx1">
                     <a:lumMod val="85000"/>
@@ -9104,7 +9104,7 @@
                 <a:ea typeface="+mj-ea"/>
                 <a:cs typeface="Arial" panose="020B0604020202020204" pitchFamily="34" charset="0"/>
               </a:rPr>
-              <a:t>данны</a:t>
+              <a:t>базы данных</a:t>
             </a:r>
             <a:br>
               <a:rPr lang="ru-RU" sz="2000" cap="all" dirty="0">
